--- a/public/seminaires/communication-pastorale/support.pptx
+++ b/public/seminaires/communication-pastorale/support.pptx
@@ -2252,16 +2252,18 @@
         <p:spPr>
           <a:xfrm>
             <a:off x="768096" y="4443984"/>
-            <a:ext cx="640080" cy="457200"/>
-          </a:xfrm>
-          <a:prstGeom prst="rect">
-            <a:avLst/>
-          </a:prstGeom>
-          <a:noFill/>
-          <a:ln/>
-        </p:spPr>
-        <p:txBody>
-          <a:bodyPr wrap="square" rtlCol="0" anchor="t"/>
+            <a:ext cx="3100730" cy="457200"/>
+          </a:xfrm>
+          <a:prstGeom prst="rect">
+            <a:avLst/>
+          </a:prstGeom>
+          <a:noFill/>
+          <a:ln/>
+        </p:spPr>
+        <p:txBody>
+          <a:bodyPr wrap="square" rtlCol="0" anchor="t">
+            <a:normAutofit/>
+          </a:bodyPr>
           <a:lstStyle/>
           <a:p>
             <a:pPr algn="l" indent="0" marL="0">
@@ -2400,16 +2402,18 @@
         <p:spPr>
           <a:xfrm>
             <a:off x="4545482" y="4443984"/>
-            <a:ext cx="640080" cy="457200"/>
-          </a:xfrm>
-          <a:prstGeom prst="rect">
-            <a:avLst/>
-          </a:prstGeom>
-          <a:noFill/>
-          <a:ln/>
-        </p:spPr>
-        <p:txBody>
-          <a:bodyPr wrap="square" rtlCol="0" anchor="t"/>
+            <a:ext cx="3100730" cy="457200"/>
+          </a:xfrm>
+          <a:prstGeom prst="rect">
+            <a:avLst/>
+          </a:prstGeom>
+          <a:noFill/>
+          <a:ln/>
+        </p:spPr>
+        <p:txBody>
+          <a:bodyPr wrap="square" rtlCol="0" anchor="t">
+            <a:normAutofit/>
+          </a:bodyPr>
           <a:lstStyle/>
           <a:p>
             <a:pPr algn="l" indent="0" marL="0">
@@ -2548,16 +2552,18 @@
         <p:spPr>
           <a:xfrm>
             <a:off x="8322869" y="4443984"/>
-            <a:ext cx="640080" cy="457200"/>
-          </a:xfrm>
-          <a:prstGeom prst="rect">
-            <a:avLst/>
-          </a:prstGeom>
-          <a:noFill/>
-          <a:ln/>
-        </p:spPr>
-        <p:txBody>
-          <a:bodyPr wrap="square" rtlCol="0" anchor="t"/>
+            <a:ext cx="3100730" cy="457200"/>
+          </a:xfrm>
+          <a:prstGeom prst="rect">
+            <a:avLst/>
+          </a:prstGeom>
+          <a:noFill/>
+          <a:ln/>
+        </p:spPr>
+        <p:txBody>
+          <a:bodyPr wrap="square" rtlCol="0" anchor="t">
+            <a:normAutofit/>
+          </a:bodyPr>
           <a:lstStyle/>
           <a:p>
             <a:pPr algn="l" indent="0" marL="0">
